--- a/classes/parte-5-explotacion-de-sistemas-y-binarios/133-analisis-estatico-de-binarios/clase-133-presentacion.pptx
+++ b/classes/parte-5-explotacion-de-sistemas-y-binarios/133-analisis-estatico-de-binarios/clase-133-presentacion.pptx
@@ -17,6 +17,8 @@
     <p:sldId id="265" r:id="rId16"/>
     <p:sldId id="266" r:id="rId17"/>
     <p:sldId id="267" r:id="rId18"/>
+    <p:sldId id="268" r:id="rId19"/>
+    <p:sldId id="269" r:id="rId20"/>
   </p:sldIdLst>
   <p:sldSz cx="9144000" cy="6858000" type="screen4x3"/>
   <p:notesSz cx="6858000" cy="9144000"/>
@@ -3198,7 +3200,7 @@
                   <a:srgbClr val="0B3D2E"/>
                 </a:solidFill>
               </a:rPr>
-              <a:t>⚠️ Errores comunes</a:t>
+              <a:t>📝 Reto verificable</a:t>
             </a:r>
           </a:p>
         </p:txBody>
@@ -3236,67 +3238,52 @@
                   <a:srgbClr val="22282E"/>
                 </a:solidFill>
               </a:rPr>
-              <a:t>•  Desensamblado "basura" a mitad — Datos incrustados; usa análisis recursivo (Ghidra/r2)</a:t>
-            </a:r>
-          </a:p>
-          <a:p>
-            <a:pPr>
-              <a:spcAft>
-                <a:spcPts val="600"/>
-              </a:spcAft>
-            </a:pPr>
-            <a:r>
-              <a:rPr sz="1500">
-                <a:solidFill>
-                  <a:srgbClr val="22282E"/>
-                </a:solidFill>
-              </a:rPr>
-              <a:t>•  Faltan funciones en el CFG — Alcanzadas por saltos indirectos; complementa con dinámico</a:t>
-            </a:r>
-          </a:p>
-          <a:p>
-            <a:pPr>
-              <a:spcAft>
-                <a:spcPts val="600"/>
-              </a:spcAft>
-            </a:pPr>
-            <a:r>
-              <a:rPr sz="1500">
-                <a:solidFill>
-                  <a:srgbClr val="22282E"/>
-                </a:solidFill>
-              </a:rPr>
-              <a:t>•  capstone no decodifica — Modo/arquitectura equivocados (32 vs 64)</a:t>
-            </a:r>
-          </a:p>
-          <a:p>
-            <a:pPr>
-              <a:spcAft>
-                <a:spcPts val="600"/>
-              </a:spcAft>
-            </a:pPr>
-            <a:r>
-              <a:rPr sz="1500">
-                <a:solidFill>
-                  <a:srgbClr val="22282E"/>
-                </a:solidFill>
-              </a:rPr>
-              <a:t>•  Binario "vacío" en objdump — Está empacado (UPX u otro); desempácalo primero</a:t>
-            </a:r>
-          </a:p>
-          <a:p>
-            <a:pPr>
-              <a:spcAft>
-                <a:spcPts val="600"/>
-              </a:spcAft>
-            </a:pPr>
-            <a:r>
-              <a:rPr sz="1500">
-                <a:solidFill>
-                  <a:srgbClr val="22282E"/>
-                </a:solidFill>
-              </a:rPr>
-              <a:t>•  Call destino incorrecto — Confundes dirección relativa con absoluta</a:t>
+              <a:t>•  Con capstone y pyelftools, escribe un script que liste todas las instrucciones call de .text con</a:t>
+            </a:r>
+          </a:p>
+          <a:p>
+            <a:pPr>
+              <a:spcAft>
+                <a:spcPts val="600"/>
+              </a:spcAft>
+            </a:pPr>
+            <a:r>
+              <a:rPr sz="1500">
+                <a:solidFill>
+                  <a:srgbClr val="22282E"/>
+                </a:solidFill>
+              </a:rPr>
+              <a:t>•  su dirección y, cuando sea directo, la función destino.</a:t>
+            </a:r>
+          </a:p>
+          <a:p>
+            <a:pPr>
+              <a:spcAft>
+                <a:spcPts val="600"/>
+              </a:spcAft>
+            </a:pPr>
+            <a:r>
+              <a:rPr sz="1500">
+                <a:solidFill>
+                  <a:srgbClr val="22282E"/>
+                </a:solidFill>
+              </a:rPr>
+              <a:t>•  Criterio de aceptación: el script imprime las llamadas directas resueltas correctamente</a:t>
+            </a:r>
+          </a:p>
+          <a:p>
+            <a:pPr>
+              <a:spcAft>
+                <a:spcPts val="600"/>
+              </a:spcAft>
+            </a:pPr>
+            <a:r>
+              <a:rPr sz="1500">
+                <a:solidFill>
+                  <a:srgbClr val="22282E"/>
+                </a:solidFill>
+              </a:rPr>
+              <a:t>•  (verificable contra objdump -d) y marca las indirectas como "no resueltas".</a:t>
             </a:r>
           </a:p>
         </p:txBody>
@@ -3347,7 +3334,7 @@
                   <a:srgbClr val="0B3D2E"/>
                 </a:solidFill>
               </a:rPr>
-              <a:t>❓ Preguntas frecuentes</a:t>
+              <a:t>⚠️ Errores comunes</a:t>
             </a:r>
           </a:p>
         </p:txBody>
@@ -3385,82 +3372,67 @@
                   <a:srgbClr val="22282E"/>
                 </a:solidFill>
               </a:rPr>
-              <a:t>•  ❓ ¿Estático o dinámico? El estático da visión global sin ejecutar; el dinámico revela lo que solo</a:t>
-            </a:r>
-          </a:p>
-          <a:p>
-            <a:pPr>
-              <a:spcAft>
-                <a:spcPts val="600"/>
-              </a:spcAft>
-            </a:pPr>
-            <a:r>
-              <a:rPr sz="1500">
-                <a:solidFill>
-                  <a:srgbClr val="22282E"/>
-                </a:solidFill>
-              </a:rPr>
-              <a:t>•  ocurre en runtime. Se complementan.</a:t>
-            </a:r>
-          </a:p>
-          <a:p>
-            <a:pPr>
-              <a:spcAft>
-                <a:spcPts val="600"/>
-              </a:spcAft>
-            </a:pPr>
-            <a:r>
-              <a:rPr sz="1500">
-                <a:solidFill>
-                  <a:srgbClr val="22282E"/>
-                </a:solidFill>
-              </a:rPr>
-              <a:t>•  ❓ ¿Cómo detecto packing? Alta entropía, pocas secciones, imports mínimos, o firmas conocidas</a:t>
-            </a:r>
-          </a:p>
-          <a:p>
-            <a:pPr>
-              <a:spcAft>
-                <a:spcPts val="600"/>
-              </a:spcAft>
-            </a:pPr>
-            <a:r>
-              <a:rPr sz="1500">
-                <a:solidFill>
-                  <a:srgbClr val="22282E"/>
-                </a:solidFill>
-              </a:rPr>
-              <a:t>•  (upx).</a:t>
-            </a:r>
-          </a:p>
-          <a:p>
-            <a:pPr>
-              <a:spcAft>
-                <a:spcPts val="600"/>
-              </a:spcAft>
-            </a:pPr>
-            <a:r>
-              <a:rPr sz="1500">
-                <a:solidFill>
-                  <a:srgbClr val="22282E"/>
-                </a:solidFill>
-              </a:rPr>
-              <a:t>•  ❓ ¿Puedo resolver saltos indirectos estáticamente? A veces con análisis de valores; en general</a:t>
-            </a:r>
-          </a:p>
-          <a:p>
-            <a:pPr>
-              <a:spcAft>
-                <a:spcPts val="600"/>
-              </a:spcAft>
-            </a:pPr>
-            <a:r>
-              <a:rPr sz="1500">
-                <a:solidFill>
-                  <a:srgbClr val="22282E"/>
-                </a:solidFill>
-              </a:rPr>
-              <a:t>•  requieren ejecución/emulación.</a:t>
+              <a:t>•  Desensamblado "basura" a mitad — Datos incrustados; usa análisis recursivo (Ghidra/r2)</a:t>
+            </a:r>
+          </a:p>
+          <a:p>
+            <a:pPr>
+              <a:spcAft>
+                <a:spcPts val="600"/>
+              </a:spcAft>
+            </a:pPr>
+            <a:r>
+              <a:rPr sz="1500">
+                <a:solidFill>
+                  <a:srgbClr val="22282E"/>
+                </a:solidFill>
+              </a:rPr>
+              <a:t>•  Faltan funciones en el CFG — Alcanzadas por saltos indirectos; complementa con dinámico</a:t>
+            </a:r>
+          </a:p>
+          <a:p>
+            <a:pPr>
+              <a:spcAft>
+                <a:spcPts val="600"/>
+              </a:spcAft>
+            </a:pPr>
+            <a:r>
+              <a:rPr sz="1500">
+                <a:solidFill>
+                  <a:srgbClr val="22282E"/>
+                </a:solidFill>
+              </a:rPr>
+              <a:t>•  capstone no decodifica — Modo/arquitectura equivocados (32 vs 64)</a:t>
+            </a:r>
+          </a:p>
+          <a:p>
+            <a:pPr>
+              <a:spcAft>
+                <a:spcPts val="600"/>
+              </a:spcAft>
+            </a:pPr>
+            <a:r>
+              <a:rPr sz="1500">
+                <a:solidFill>
+                  <a:srgbClr val="22282E"/>
+                </a:solidFill>
+              </a:rPr>
+              <a:t>•  Binario "vacío" en objdump — Está empacado (UPX u otro); desempácalo primero</a:t>
+            </a:r>
+          </a:p>
+          <a:p>
+            <a:pPr>
+              <a:spcAft>
+                <a:spcPts val="600"/>
+              </a:spcAft>
+            </a:pPr>
+            <a:r>
+              <a:rPr sz="1500">
+                <a:solidFill>
+                  <a:srgbClr val="22282E"/>
+                </a:solidFill>
+              </a:rPr>
+              <a:t>•  Call destino incorrecto — Confundes dirección relativa con absoluta</a:t>
             </a:r>
           </a:p>
         </p:txBody>
@@ -3511,7 +3483,7 @@
                   <a:srgbClr val="0B3D2E"/>
                 </a:solidFill>
               </a:rPr>
-              <a:t>🔗 Referencias</a:t>
+              <a:t>❓ Preguntas frecuentes</a:t>
             </a:r>
           </a:p>
         </p:txBody>
@@ -3549,6 +3521,170 @@
                   <a:srgbClr val="22282E"/>
                 </a:solidFill>
               </a:rPr>
+              <a:t>•  ❓ ¿Estático o dinámico? El estático da visión global sin ejecutar; el dinámico revela lo que solo</a:t>
+            </a:r>
+          </a:p>
+          <a:p>
+            <a:pPr>
+              <a:spcAft>
+                <a:spcPts val="600"/>
+              </a:spcAft>
+            </a:pPr>
+            <a:r>
+              <a:rPr sz="1500">
+                <a:solidFill>
+                  <a:srgbClr val="22282E"/>
+                </a:solidFill>
+              </a:rPr>
+              <a:t>•  ocurre en runtime. Se complementan.</a:t>
+            </a:r>
+          </a:p>
+          <a:p>
+            <a:pPr>
+              <a:spcAft>
+                <a:spcPts val="600"/>
+              </a:spcAft>
+            </a:pPr>
+            <a:r>
+              <a:rPr sz="1500">
+                <a:solidFill>
+                  <a:srgbClr val="22282E"/>
+                </a:solidFill>
+              </a:rPr>
+              <a:t>•  ❓ ¿Cómo detecto packing? Alta entropía, pocas secciones, imports mínimos, o firmas conocidas</a:t>
+            </a:r>
+          </a:p>
+          <a:p>
+            <a:pPr>
+              <a:spcAft>
+                <a:spcPts val="600"/>
+              </a:spcAft>
+            </a:pPr>
+            <a:r>
+              <a:rPr sz="1500">
+                <a:solidFill>
+                  <a:srgbClr val="22282E"/>
+                </a:solidFill>
+              </a:rPr>
+              <a:t>•  (upx).</a:t>
+            </a:r>
+          </a:p>
+          <a:p>
+            <a:pPr>
+              <a:spcAft>
+                <a:spcPts val="600"/>
+              </a:spcAft>
+            </a:pPr>
+            <a:r>
+              <a:rPr sz="1500">
+                <a:solidFill>
+                  <a:srgbClr val="22282E"/>
+                </a:solidFill>
+              </a:rPr>
+              <a:t>•  ❓ ¿Puedo resolver saltos indirectos estáticamente? A veces con análisis de valores; en general</a:t>
+            </a:r>
+          </a:p>
+          <a:p>
+            <a:pPr>
+              <a:spcAft>
+                <a:spcPts val="600"/>
+              </a:spcAft>
+            </a:pPr>
+            <a:r>
+              <a:rPr sz="1500">
+                <a:solidFill>
+                  <a:srgbClr val="22282E"/>
+                </a:solidFill>
+              </a:rPr>
+              <a:t>•  requieren ejecución/emulación.</a:t>
+            </a:r>
+          </a:p>
+        </p:txBody>
+      </p:sp>
+    </p:spTree>
+  </p:cSld>
+  <p:clrMapOvr>
+    <a:masterClrMapping/>
+  </p:clrMapOvr>
+</p:sld>
+</file>
+
+<file path=ppt/slides/slide13.xml><?xml version="1.0" encoding="utf-8"?>
+<p:sld xmlns:a="http://schemas.openxmlformats.org/drawingml/2006/main" xmlns:p="http://schemas.openxmlformats.org/presentationml/2006/main" xmlns:r="http://schemas.openxmlformats.org/officeDocument/2006/relationships">
+  <p:cSld>
+    <p:spTree>
+      <p:nvGrpSpPr>
+        <p:cNvPr id="1" name=""/>
+        <p:cNvGrpSpPr/>
+        <p:nvPr/>
+      </p:nvGrpSpPr>
+      <p:grpSpPr/>
+      <p:sp>
+        <p:nvSpPr>
+          <p:cNvPr id="2" name="TextBox 1"/>
+          <p:cNvSpPr txBox="1"/>
+          <p:nvPr/>
+        </p:nvSpPr>
+        <p:spPr>
+          <a:xfrm>
+            <a:off x="457200" y="320040"/>
+            <a:ext cx="8229600" cy="822960"/>
+          </a:xfrm>
+          <a:prstGeom prst="rect">
+            <a:avLst/>
+          </a:prstGeom>
+          <a:noFill/>
+        </p:spPr>
+        <p:txBody>
+          <a:bodyPr wrap="square">
+            <a:spAutoFit/>
+          </a:bodyPr>
+          <a:lstStyle/>
+          <a:p>
+            <a:r>
+              <a:rPr sz="2600" b="1">
+                <a:solidFill>
+                  <a:srgbClr val="0B3D2E"/>
+                </a:solidFill>
+              </a:rPr>
+              <a:t>🔗 Referencias</a:t>
+            </a:r>
+          </a:p>
+        </p:txBody>
+      </p:sp>
+      <p:sp>
+        <p:nvSpPr>
+          <p:cNvPr id="3" name="TextBox 2"/>
+          <p:cNvSpPr txBox="1"/>
+          <p:nvPr/>
+        </p:nvSpPr>
+        <p:spPr>
+          <a:xfrm>
+            <a:off x="457200" y="1280160"/>
+            <a:ext cx="8229600" cy="4937760"/>
+          </a:xfrm>
+          <a:prstGeom prst="rect">
+            <a:avLst/>
+          </a:prstGeom>
+          <a:noFill/>
+        </p:spPr>
+        <p:txBody>
+          <a:bodyPr wrap="square">
+            <a:spAutoFit/>
+          </a:bodyPr>
+          <a:lstStyle/>
+          <a:p>
+            <a:pPr>
+              <a:spcAft>
+                <a:spcPts val="600"/>
+              </a:spcAft>
+            </a:pPr>
+            <a:r>
+              <a:rPr sz="1500">
+                <a:solidFill>
+                  <a:srgbClr val="22282E"/>
+                </a:solidFill>
+              </a:rPr>
               <a:t>•  Andriesse, D. Practical Binary Analysis, caps. 5-8. No Starch Press.</a:t>
             </a:r>
           </a:p>
@@ -3599,6 +3735,81 @@
           </a:p>
         </p:txBody>
       </p:sp>
+    </p:spTree>
+  </p:cSld>
+  <p:clrMapOvr>
+    <a:masterClrMapping/>
+  </p:clrMapOvr>
+</p:sld>
+</file>
+
+<file path=ppt/slides/slide14.xml><?xml version="1.0" encoding="utf-8"?>
+<p:sld xmlns:a="http://schemas.openxmlformats.org/drawingml/2006/main" xmlns:p="http://schemas.openxmlformats.org/presentationml/2006/main" xmlns:r="http://schemas.openxmlformats.org/officeDocument/2006/relationships">
+  <p:cSld>
+    <p:spTree>
+      <p:nvGrpSpPr>
+        <p:cNvPr id="1" name=""/>
+        <p:cNvGrpSpPr/>
+        <p:nvPr/>
+      </p:nvGrpSpPr>
+      <p:grpSpPr/>
+      <p:sp>
+        <p:nvSpPr>
+          <p:cNvPr id="2" name="TextBox 1"/>
+          <p:cNvSpPr txBox="1"/>
+          <p:nvPr/>
+        </p:nvSpPr>
+        <p:spPr>
+          <a:xfrm>
+            <a:off x="457200" y="274320"/>
+            <a:ext cx="8229600" cy="640080"/>
+          </a:xfrm>
+          <a:prstGeom prst="rect">
+            <a:avLst/>
+          </a:prstGeom>
+          <a:noFill/>
+        </p:spPr>
+        <p:txBody>
+          <a:bodyPr wrap="square">
+            <a:spAutoFit/>
+          </a:bodyPr>
+          <a:lstStyle/>
+          <a:p>
+            <a:r>
+              <a:rPr sz="2200" b="1">
+                <a:solidFill>
+                  <a:srgbClr val="0B3D2E"/>
+                </a:solidFill>
+              </a:rPr>
+              <a:t>Diagrama de la clase</a:t>
+            </a:r>
+          </a:p>
+        </p:txBody>
+      </p:sp>
+      <p:pic>
+        <p:nvPicPr>
+          <p:cNvPr id="3" name="Picture 2" descr="c306db86c5d337c3.png"/>
+          <p:cNvPicPr>
+            <a:picLocks noChangeAspect="1"/>
+          </p:cNvPicPr>
+          <p:nvPr/>
+        </p:nvPicPr>
+        <p:blipFill>
+          <a:blip r:embed="rId2"/>
+          <a:stretch>
+            <a:fillRect/>
+          </a:stretch>
+        </p:blipFill>
+        <p:spPr>
+          <a:xfrm>
+            <a:off x="3063329" y="1097280"/>
+            <a:ext cx="3017342" cy="5303520"/>
+          </a:xfrm>
+          <a:prstGeom prst="rect">
+            <a:avLst/>
+          </a:prstGeom>
+        </p:spPr>
+      </p:pic>
     </p:spTree>
   </p:cSld>
   <p:clrMapOvr>
@@ -4122,7 +4333,7 @@
                   <a:srgbClr val="0B3D2E"/>
                 </a:solidFill>
               </a:rPr>
-              <a:t>📖 Definiciones y características</a:t>
+              <a:t>🧠 Explicación en profundidad</a:t>
             </a:r>
           </a:p>
         </p:txBody>
@@ -4160,97 +4371,97 @@
                   <a:srgbClr val="22282E"/>
                 </a:solidFill>
               </a:rPr>
-              <a:t>•  Desensamblado lineal: decodifica byte a byte de inicio a fin. Clave: rápido, pero interpreta</a:t>
-            </a:r>
-          </a:p>
-          <a:p>
-            <a:pPr>
-              <a:spcAft>
-                <a:spcPts val="600"/>
-              </a:spcAft>
-            </a:pPr>
-            <a:r>
-              <a:rPr sz="1500">
-                <a:solidFill>
-                  <a:srgbClr val="22282E"/>
-                </a:solidFill>
-              </a:rPr>
-              <a:t>•  datos incrustados como código (errores de sincronización).</a:t>
-            </a:r>
-          </a:p>
-          <a:p>
-            <a:pPr>
-              <a:spcAft>
-                <a:spcPts val="600"/>
-              </a:spcAft>
-            </a:pPr>
-            <a:r>
-              <a:rPr sz="1500">
-                <a:solidFill>
-                  <a:srgbClr val="22282E"/>
-                </a:solidFill>
-              </a:rPr>
-              <a:t>•  Desensamblado recursivo: sigue saltos/llamadas desde el entry point. Clave: más preciso; puede</a:t>
-            </a:r>
-          </a:p>
-          <a:p>
-            <a:pPr>
-              <a:spcAft>
-                <a:spcPts val="600"/>
-              </a:spcAft>
-            </a:pPr>
-            <a:r>
-              <a:rPr sz="1500">
-                <a:solidFill>
-                  <a:srgbClr val="22282E"/>
-                </a:solidFill>
-              </a:rPr>
-              <a:t>•  perder código alcanzado solo por saltos indirectos.</a:t>
-            </a:r>
-          </a:p>
-          <a:p>
-            <a:pPr>
-              <a:spcAft>
-                <a:spcPts val="600"/>
-              </a:spcAft>
-            </a:pPr>
-            <a:r>
-              <a:rPr sz="1500">
-                <a:solidFill>
-                  <a:srgbClr val="22282E"/>
-                </a:solidFill>
-              </a:rPr>
-              <a:t>•  CFG: grafo de bloques básicos y aristas de salto. Clave: revela bucles, ramas y estructura.</a:t>
-            </a:r>
-          </a:p>
-          <a:p>
-            <a:pPr>
-              <a:spcAft>
-                <a:spcPts val="600"/>
-              </a:spcAft>
-            </a:pPr>
-            <a:r>
-              <a:rPr sz="1500">
-                <a:solidFill>
-                  <a:srgbClr val="22282E"/>
-                </a:solidFill>
-              </a:rPr>
-              <a:t>•  Call graph: grafo de qué función llama a cuál. Clave: ayuda a priorizar funciones interesantes.</a:t>
-            </a:r>
-          </a:p>
-          <a:p>
-            <a:pPr>
-              <a:spcAft>
-                <a:spcPts val="600"/>
-              </a:spcAft>
-            </a:pPr>
-            <a:r>
-              <a:rPr sz="1500">
-                <a:solidFill>
-                  <a:srgbClr val="22282E"/>
-                </a:solidFill>
-              </a:rPr>
-              <a:t>•  Análisis def-use: dónde se define y usa un valor. Clave: base para propagación de constantes y</a:t>
+              <a:t>•  El análisis estático examina un binario sin ejecutarlo, razonando sobre su código. Sus</a:t>
+            </a:r>
+          </a:p>
+          <a:p>
+            <a:pPr>
+              <a:spcAft>
+                <a:spcPts val="600"/>
+              </a:spcAft>
+            </a:pPr>
+            <a:r>
+              <a:rPr sz="1500">
+                <a:solidFill>
+                  <a:srgbClr val="22282E"/>
+                </a:solidFill>
+              </a:rPr>
+              <a:t>•  ventajas son grandes: es seguro (no se ejecuta código potencialmente malicioso, crucial para</a:t>
+            </a:r>
+          </a:p>
+          <a:p>
+            <a:pPr>
+              <a:spcAft>
+                <a:spcPts val="600"/>
+              </a:spcAft>
+            </a:pPr>
+            <a:r>
+              <a:rPr sz="1500">
+                <a:solidFill>
+                  <a:srgbClr val="22282E"/>
+                </a:solidFill>
+              </a:rPr>
+              <a:t>•  malware), da una visión completa de todos los caminos posibles del programa (no solo los que se</a:t>
+            </a:r>
+          </a:p>
+          <a:p>
+            <a:pPr>
+              <a:spcAft>
+                <a:spcPts val="600"/>
+              </a:spcAft>
+            </a:pPr>
+            <a:r>
+              <a:rPr sz="1500">
+                <a:solidFill>
+                  <a:srgbClr val="22282E"/>
+                </a:solidFill>
+              </a:rPr>
+              <a:t>•  ejecutan en una corrida concreta), y no requiere el entorno exacto del binario. Su reto es que hay que</a:t>
+            </a:r>
+          </a:p>
+          <a:p>
+            <a:pPr>
+              <a:spcAft>
+                <a:spcPts val="600"/>
+              </a:spcAft>
+            </a:pPr>
+            <a:r>
+              <a:rPr sz="1500">
+                <a:solidFill>
+                  <a:srgbClr val="22282E"/>
+                </a:solidFill>
+              </a:rPr>
+              <a:t>•  deducir el comportamiento de un código que puede ser enorme y del que se ha borrado el significado.</a:t>
+            </a:r>
+          </a:p>
+          <a:p>
+            <a:pPr>
+              <a:spcAft>
+                <a:spcPts val="600"/>
+              </a:spcAft>
+            </a:pPr>
+            <a:r>
+              <a:rPr sz="1500">
+                <a:solidFill>
+                  <a:srgbClr val="22282E"/>
+                </a:solidFill>
+              </a:rPr>
+              <a:t>•  Esta clase sistematiza los conceptos que estructuran ese análisis, que las herramientas de las clases</a:t>
+            </a:r>
+          </a:p>
+          <a:p>
+            <a:pPr>
+              <a:spcAft>
+                <a:spcPts val="600"/>
+              </a:spcAft>
+            </a:pPr>
+            <a:r>
+              <a:rPr sz="1500">
+                <a:solidFill>
+                  <a:srgbClr val="22282E"/>
+                </a:solidFill>
+              </a:rPr>
+              <a:t>•  anteriores implementan.</a:t>
             </a:r>
           </a:p>
         </p:txBody>
@@ -4301,7 +4512,7 @@
                   <a:srgbClr val="0B3D2E"/>
                 </a:solidFill>
               </a:rPr>
-              <a:t>🧰 Herramientas y preparación</a:t>
+              <a:t>📖 Definiciones y características</a:t>
             </a:r>
           </a:p>
         </p:txBody>
@@ -4339,22 +4550,97 @@
                   <a:srgbClr val="22282E"/>
                 </a:solidFill>
               </a:rPr>
-              <a:t>•  pip install capstone pyelftools</a:t>
-            </a:r>
-          </a:p>
-          <a:p>
-            <a:pPr>
-              <a:spcAft>
-                <a:spcPts val="600"/>
-              </a:spcAft>
-            </a:pPr>
-            <a:r>
-              <a:rPr sz="1500">
-                <a:solidFill>
-                  <a:srgbClr val="22282E"/>
-                </a:solidFill>
-              </a:rPr>
-              <a:t>•  sudo apt install -y binutils</a:t>
+              <a:t>•  Desensamblado lineal: decodifica byte a byte de inicio a fin. Clave: rápido, pero interpreta</a:t>
+            </a:r>
+          </a:p>
+          <a:p>
+            <a:pPr>
+              <a:spcAft>
+                <a:spcPts val="600"/>
+              </a:spcAft>
+            </a:pPr>
+            <a:r>
+              <a:rPr sz="1500">
+                <a:solidFill>
+                  <a:srgbClr val="22282E"/>
+                </a:solidFill>
+              </a:rPr>
+              <a:t>•  datos incrustados como código (errores de sincronización).</a:t>
+            </a:r>
+          </a:p>
+          <a:p>
+            <a:pPr>
+              <a:spcAft>
+                <a:spcPts val="600"/>
+              </a:spcAft>
+            </a:pPr>
+            <a:r>
+              <a:rPr sz="1500">
+                <a:solidFill>
+                  <a:srgbClr val="22282E"/>
+                </a:solidFill>
+              </a:rPr>
+              <a:t>•  Desensamblado recursivo: sigue saltos/llamadas desde el entry point. Clave: más preciso; puede</a:t>
+            </a:r>
+          </a:p>
+          <a:p>
+            <a:pPr>
+              <a:spcAft>
+                <a:spcPts val="600"/>
+              </a:spcAft>
+            </a:pPr>
+            <a:r>
+              <a:rPr sz="1500">
+                <a:solidFill>
+                  <a:srgbClr val="22282E"/>
+                </a:solidFill>
+              </a:rPr>
+              <a:t>•  perder código alcanzado solo por saltos indirectos.</a:t>
+            </a:r>
+          </a:p>
+          <a:p>
+            <a:pPr>
+              <a:spcAft>
+                <a:spcPts val="600"/>
+              </a:spcAft>
+            </a:pPr>
+            <a:r>
+              <a:rPr sz="1500">
+                <a:solidFill>
+                  <a:srgbClr val="22282E"/>
+                </a:solidFill>
+              </a:rPr>
+              <a:t>•  CFG: grafo de bloques básicos y aristas de salto. Clave: revela bucles, ramas y estructura.</a:t>
+            </a:r>
+          </a:p>
+          <a:p>
+            <a:pPr>
+              <a:spcAft>
+                <a:spcPts val="600"/>
+              </a:spcAft>
+            </a:pPr>
+            <a:r>
+              <a:rPr sz="1500">
+                <a:solidFill>
+                  <a:srgbClr val="22282E"/>
+                </a:solidFill>
+              </a:rPr>
+              <a:t>•  Call graph: grafo de qué función llama a cuál. Clave: ayuda a priorizar funciones interesantes.</a:t>
+            </a:r>
+          </a:p>
+          <a:p>
+            <a:pPr>
+              <a:spcAft>
+                <a:spcPts val="600"/>
+              </a:spcAft>
+            </a:pPr>
+            <a:r>
+              <a:rPr sz="1500">
+                <a:solidFill>
+                  <a:srgbClr val="22282E"/>
+                </a:solidFill>
+              </a:rPr>
+              <a:t>•  Análisis def-use: dónde se define y usa un valor. Clave: base para propagación de constantes y</a:t>
             </a:r>
           </a:p>
         </p:txBody>
@@ -4405,7 +4691,7 @@
                   <a:srgbClr val="0B3D2E"/>
                 </a:solidFill>
               </a:rPr>
-              <a:t>🧪 Laboratorio guiado</a:t>
+              <a:t>📔 Glosario</a:t>
             </a:r>
           </a:p>
         </p:txBody>
@@ -4443,97 +4729,97 @@
                   <a:srgbClr val="22282E"/>
                 </a:solidFill>
               </a:rPr>
-              <a:t>•  Compara desensamblado lineal vs recursivo en un binario con datos incrustados:</a:t>
-            </a:r>
-          </a:p>
-          <a:p>
-            <a:pPr>
-              <a:spcAft>
-                <a:spcPts val="600"/>
-              </a:spcAft>
-            </a:pPr>
-            <a:r>
-              <a:rPr sz="1500">
-                <a:solidFill>
-                  <a:srgbClr val="22282E"/>
-                </a:solidFill>
-              </a:rPr>
-              <a:t>•  objdump -d crackme          # lineal (GNU)</a:t>
-            </a:r>
-          </a:p>
-          <a:p>
-            <a:pPr>
-              <a:spcAft>
-                <a:spcPts val="600"/>
-              </a:spcAft>
-            </a:pPr>
-            <a:r>
-              <a:rPr sz="1500">
-                <a:solidFill>
-                  <a:srgbClr val="22282E"/>
-                </a:solidFill>
-              </a:rPr>
-              <a:t>•  Reconstruye el CFG de main en Ghidra (Window → Function Graph) e identifica bucles y ramas de</a:t>
-            </a:r>
-          </a:p>
-          <a:p>
-            <a:pPr>
-              <a:spcAft>
-                <a:spcPts val="600"/>
-              </a:spcAft>
-            </a:pPr>
-            <a:r>
-              <a:rPr sz="1500">
-                <a:solidFill>
-                  <a:srgbClr val="22282E"/>
-                </a:solidFill>
-              </a:rPr>
-              <a:t>•  éxito/fracaso.</a:t>
-            </a:r>
-          </a:p>
-          <a:p>
-            <a:pPr>
-              <a:spcAft>
-                <a:spcPts val="600"/>
-              </a:spcAft>
-            </a:pPr>
-            <a:r>
-              <a:rPr sz="1500">
-                <a:solidFill>
-                  <a:srgbClr val="22282E"/>
-                </a:solidFill>
-              </a:rPr>
-              <a:t>•  Escribe un desensamblador mínimo con capstone para ver cómo se decodifican instrucciones:</a:t>
-            </a:r>
-          </a:p>
-          <a:p>
-            <a:pPr>
-              <a:spcAft>
-                <a:spcPts val="600"/>
-              </a:spcAft>
-            </a:pPr>
-            <a:r>
-              <a:rPr sz="1500">
-                <a:solidFill>
-                  <a:srgbClr val="22282E"/>
-                </a:solidFill>
-              </a:rPr>
-              <a:t>•  from capstone import</a:t>
-            </a:r>
-          </a:p>
-          <a:p>
-            <a:pPr>
-              <a:spcAft>
-                <a:spcPts val="600"/>
-              </a:spcAft>
-            </a:pPr>
-            <a:r>
-              <a:rPr sz="1500">
-                <a:solidFill>
-                  <a:srgbClr val="22282E"/>
-                </a:solidFill>
-              </a:rPr>
-              <a:t>•  from elftools.elf.elffile import ELFFile</a:t>
+              <a:t>•  Término — Definición concisa</a:t>
+            </a:r>
+          </a:p>
+          <a:p>
+            <a:pPr>
+              <a:spcAft>
+                <a:spcPts val="600"/>
+              </a:spcAft>
+            </a:pPr>
+            <a:r>
+              <a:rPr sz="1500">
+                <a:solidFill>
+                  <a:srgbClr val="22282E"/>
+                </a:solidFill>
+              </a:rPr>
+              <a:t>•  Análisis estático — Examinar el binario sin ejecutarlo</a:t>
+            </a:r>
+          </a:p>
+          <a:p>
+            <a:pPr>
+              <a:spcAft>
+                <a:spcPts val="600"/>
+              </a:spcAft>
+            </a:pPr>
+            <a:r>
+              <a:rPr sz="1500">
+                <a:solidFill>
+                  <a:srgbClr val="22282E"/>
+                </a:solidFill>
+              </a:rPr>
+              <a:t>•  Desensamblado lineal — Recorre los bytes en orden; se descarrila con datos</a:t>
+            </a:r>
+          </a:p>
+          <a:p>
+            <a:pPr>
+              <a:spcAft>
+                <a:spcPts val="600"/>
+              </a:spcAft>
+            </a:pPr>
+            <a:r>
+              <a:rPr sz="1500">
+                <a:solidFill>
+                  <a:srgbClr val="22282E"/>
+                </a:solidFill>
+              </a:rPr>
+              <a:t>•  Desensamblado recursivo — Sigue el flujo de control; pierde saltos indirectos</a:t>
+            </a:r>
+          </a:p>
+          <a:p>
+            <a:pPr>
+              <a:spcAft>
+                <a:spcPts val="600"/>
+              </a:spcAft>
+            </a:pPr>
+            <a:r>
+              <a:rPr sz="1500">
+                <a:solidFill>
+                  <a:srgbClr val="22282E"/>
+                </a:solidFill>
+              </a:rPr>
+              <a:t>•  Descarrilamiento — Interpretar datos como instrucciones</a:t>
+            </a:r>
+          </a:p>
+          <a:p>
+            <a:pPr>
+              <a:spcAft>
+                <a:spcPts val="600"/>
+              </a:spcAft>
+            </a:pPr>
+            <a:r>
+              <a:rPr sz="1500">
+                <a:solidFill>
+                  <a:srgbClr val="22282E"/>
+                </a:solidFill>
+              </a:rPr>
+              <a:t>•  Salto indirecto — Destino calculado en ejecución; invisible en estático</a:t>
+            </a:r>
+          </a:p>
+          <a:p>
+            <a:pPr>
+              <a:spcAft>
+                <a:spcPts val="600"/>
+              </a:spcAft>
+            </a:pPr>
+            <a:r>
+              <a:rPr sz="1500">
+                <a:solidFill>
+                  <a:srgbClr val="22282E"/>
+                </a:solidFill>
+              </a:rPr>
+              <a:t>•  CFG — Grafo de flujo de control de una función</a:t>
             </a:r>
           </a:p>
         </p:txBody>
@@ -4584,7 +4870,7 @@
                   <a:srgbClr val="0B3D2E"/>
                 </a:solidFill>
               </a:rPr>
-              <a:t>✍️ Ejercicios</a:t>
+              <a:t>🧪 Laboratorio guiado</a:t>
             </a:r>
           </a:p>
         </p:txBody>
@@ -4622,82 +4908,97 @@
                   <a:srgbClr val="22282E"/>
                 </a:solidFill>
               </a:rPr>
-              <a:t>•  Encuentra un caso donde el desensamblado lineal se desincronice.</a:t>
-            </a:r>
-          </a:p>
-          <a:p>
-            <a:pPr>
-              <a:spcAft>
-                <a:spcPts val="600"/>
-              </a:spcAft>
-            </a:pPr>
-            <a:r>
-              <a:rPr sz="1500">
-                <a:solidFill>
-                  <a:srgbClr val="22282E"/>
-                </a:solidFill>
-              </a:rPr>
-              <a:t>•  Dibuja el CFG de una función con un bucle y una condición.</a:t>
-            </a:r>
-          </a:p>
-          <a:p>
-            <a:pPr>
-              <a:spcAft>
-                <a:spcPts val="600"/>
-              </a:spcAft>
-            </a:pPr>
-            <a:r>
-              <a:rPr sz="1500">
-                <a:solidFill>
-                  <a:srgbClr val="22282E"/>
-                </a:solidFill>
-              </a:rPr>
-              <a:t>•  Construye el call graph parcial de un binario pequeño.</a:t>
-            </a:r>
-          </a:p>
-          <a:p>
-            <a:pPr>
-              <a:spcAft>
-                <a:spcPts val="600"/>
-              </a:spcAft>
-            </a:pPr>
-            <a:r>
-              <a:rPr sz="1500">
-                <a:solidFill>
-                  <a:srgbClr val="22282E"/>
-                </a:solidFill>
-              </a:rPr>
-              <a:t>•  Usa capstone para contar cuántas instrucciones call hay en .text.</a:t>
-            </a:r>
-          </a:p>
-          <a:p>
-            <a:pPr>
-              <a:spcAft>
-                <a:spcPts val="600"/>
-              </a:spcAft>
-            </a:pPr>
-            <a:r>
-              <a:rPr sz="1500">
-                <a:solidFill>
-                  <a:srgbClr val="22282E"/>
-                </a:solidFill>
-              </a:rPr>
-              <a:t>•  Detecta con upx -t/entropía si un binario está empacado.</a:t>
-            </a:r>
-          </a:p>
-          <a:p>
-            <a:pPr>
-              <a:spcAft>
-                <a:spcPts val="600"/>
-              </a:spcAft>
-            </a:pPr>
-            <a:r>
-              <a:rPr sz="1500">
-                <a:solidFill>
-                  <a:srgbClr val="22282E"/>
-                </a:solidFill>
-              </a:rPr>
-              <a:t>•  Identifica un salto indirecto (jmp rax) y explica por qué complica el estático.</a:t>
+              <a:t>•  Compara desensamblado lineal vs recursivo en un binario con datos incrustados:</a:t>
+            </a:r>
+          </a:p>
+          <a:p>
+            <a:pPr>
+              <a:spcAft>
+                <a:spcPts val="600"/>
+              </a:spcAft>
+            </a:pPr>
+            <a:r>
+              <a:rPr sz="1500">
+                <a:solidFill>
+                  <a:srgbClr val="22282E"/>
+                </a:solidFill>
+              </a:rPr>
+              <a:t>•  Reconstruye el CFG de main en Ghidra (Window → Function Graph) e identifica bucles y ramas de</a:t>
+            </a:r>
+          </a:p>
+          <a:p>
+            <a:pPr>
+              <a:spcAft>
+                <a:spcPts val="600"/>
+              </a:spcAft>
+            </a:pPr>
+            <a:r>
+              <a:rPr sz="1500">
+                <a:solidFill>
+                  <a:srgbClr val="22282E"/>
+                </a:solidFill>
+              </a:rPr>
+              <a:t>•  éxito/fracaso.</a:t>
+            </a:r>
+          </a:p>
+          <a:p>
+            <a:pPr>
+              <a:spcAft>
+                <a:spcPts val="600"/>
+              </a:spcAft>
+            </a:pPr>
+            <a:r>
+              <a:rPr sz="1500">
+                <a:solidFill>
+                  <a:srgbClr val="22282E"/>
+                </a:solidFill>
+              </a:rPr>
+              <a:t>•  Escribe un desensamblador mínimo con capstone para ver cómo se decodifican instrucciones:</a:t>
+            </a:r>
+          </a:p>
+          <a:p>
+            <a:pPr>
+              <a:spcAft>
+                <a:spcPts val="600"/>
+              </a:spcAft>
+            </a:pPr>
+            <a:r>
+              <a:rPr sz="1500">
+                <a:solidFill>
+                  <a:srgbClr val="22282E"/>
+                </a:solidFill>
+              </a:rPr>
+              <a:t>•  Haz un análisis def-use manual de la variable de entrada: dónde se lee (scanf), dónde se compara,</a:t>
+            </a:r>
+          </a:p>
+          <a:p>
+            <a:pPr>
+              <a:spcAft>
+                <a:spcPts val="600"/>
+              </a:spcAft>
+            </a:pPr>
+            <a:r>
+              <a:rPr sz="1500">
+                <a:solidFill>
+                  <a:srgbClr val="22282E"/>
+                </a:solidFill>
+              </a:rPr>
+              <a:t>•  qué transformación sufre.</a:t>
+            </a:r>
+          </a:p>
+          <a:p>
+            <a:pPr>
+              <a:spcAft>
+                <a:spcPts val="600"/>
+              </a:spcAft>
+            </a:pPr>
+            <a:r>
+              <a:rPr sz="1500">
+                <a:solidFill>
+                  <a:srgbClr val="22282E"/>
+                </a:solidFill>
+              </a:rPr>
+              <a:t>•  Empaqueta un binario con upx y muestra que el desensamblado estático solo ve el stub (límite del</a:t>
             </a:r>
           </a:p>
         </p:txBody>
@@ -4748,7 +5049,7 @@
                   <a:srgbClr val="0B3D2E"/>
                 </a:solidFill>
               </a:rPr>
-              <a:t>📝 Reto verificable</a:t>
+              <a:t>✍️ Ejercicios</a:t>
             </a:r>
           </a:p>
         </p:txBody>
@@ -4786,52 +5087,82 @@
                   <a:srgbClr val="22282E"/>
                 </a:solidFill>
               </a:rPr>
-              <a:t>•  Con capstone y pyelftools, escribe un script que liste todas las instrucciones call de .text con</a:t>
-            </a:r>
-          </a:p>
-          <a:p>
-            <a:pPr>
-              <a:spcAft>
-                <a:spcPts val="600"/>
-              </a:spcAft>
-            </a:pPr>
-            <a:r>
-              <a:rPr sz="1500">
-                <a:solidFill>
-                  <a:srgbClr val="22282E"/>
-                </a:solidFill>
-              </a:rPr>
-              <a:t>•  su dirección y, cuando sea directo, la función destino.</a:t>
-            </a:r>
-          </a:p>
-          <a:p>
-            <a:pPr>
-              <a:spcAft>
-                <a:spcPts val="600"/>
-              </a:spcAft>
-            </a:pPr>
-            <a:r>
-              <a:rPr sz="1500">
-                <a:solidFill>
-                  <a:srgbClr val="22282E"/>
-                </a:solidFill>
-              </a:rPr>
-              <a:t>•  Criterio de aceptación: el script imprime las llamadas directas resueltas correctamente</a:t>
-            </a:r>
-          </a:p>
-          <a:p>
-            <a:pPr>
-              <a:spcAft>
-                <a:spcPts val="600"/>
-              </a:spcAft>
-            </a:pPr>
-            <a:r>
-              <a:rPr sz="1500">
-                <a:solidFill>
-                  <a:srgbClr val="22282E"/>
-                </a:solidFill>
-              </a:rPr>
-              <a:t>•  (verificable contra objdump -d) y marca las indirectas como "no resueltas".</a:t>
+              <a:t>•  Encuentra un caso donde el desensamblado lineal se desincronice.</a:t>
+            </a:r>
+          </a:p>
+          <a:p>
+            <a:pPr>
+              <a:spcAft>
+                <a:spcPts val="600"/>
+              </a:spcAft>
+            </a:pPr>
+            <a:r>
+              <a:rPr sz="1500">
+                <a:solidFill>
+                  <a:srgbClr val="22282E"/>
+                </a:solidFill>
+              </a:rPr>
+              <a:t>•  Dibuja el CFG de una función con un bucle y una condición.</a:t>
+            </a:r>
+          </a:p>
+          <a:p>
+            <a:pPr>
+              <a:spcAft>
+                <a:spcPts val="600"/>
+              </a:spcAft>
+            </a:pPr>
+            <a:r>
+              <a:rPr sz="1500">
+                <a:solidFill>
+                  <a:srgbClr val="22282E"/>
+                </a:solidFill>
+              </a:rPr>
+              <a:t>•  Construye el call graph parcial de un binario pequeño.</a:t>
+            </a:r>
+          </a:p>
+          <a:p>
+            <a:pPr>
+              <a:spcAft>
+                <a:spcPts val="600"/>
+              </a:spcAft>
+            </a:pPr>
+            <a:r>
+              <a:rPr sz="1500">
+                <a:solidFill>
+                  <a:srgbClr val="22282E"/>
+                </a:solidFill>
+              </a:rPr>
+              <a:t>•  Usa capstone para contar cuántas instrucciones call hay en .text.</a:t>
+            </a:r>
+          </a:p>
+          <a:p>
+            <a:pPr>
+              <a:spcAft>
+                <a:spcPts val="600"/>
+              </a:spcAft>
+            </a:pPr>
+            <a:r>
+              <a:rPr sz="1500">
+                <a:solidFill>
+                  <a:srgbClr val="22282E"/>
+                </a:solidFill>
+              </a:rPr>
+              <a:t>•  Detecta con upx -t/entropía si un binario está empacado.</a:t>
+            </a:r>
+          </a:p>
+          <a:p>
+            <a:pPr>
+              <a:spcAft>
+                <a:spcPts val="600"/>
+              </a:spcAft>
+            </a:pPr>
+            <a:r>
+              <a:rPr sz="1500">
+                <a:solidFill>
+                  <a:srgbClr val="22282E"/>
+                </a:solidFill>
+              </a:rPr>
+              <a:t>•  Identifica un salto indirecto (jmp rax) y explica por qué complica el estático.</a:t>
             </a:r>
           </a:p>
         </p:txBody>
